--- a/output/slides/happiness_analysis_final.pptx
+++ b/output/slides/happiness_analysis_final.pptx
@@ -4713,8 +4713,8 @@
           </p:nvSpPr>
           <p:spPr>
             <a:xfrm>
-              <a:off x="4817664" y="4143914"/>
-              <a:ext cx="4094329" cy="861774"/>
+              <a:off x="4704080" y="4143914"/>
+              <a:ext cx="4207913" cy="861774"/>
             </a:xfrm>
             <a:prstGeom prst="rect">
               <a:avLst/>
@@ -4739,7 +4739,7 @@
               </a:pPr>
               <a:r>
                 <a:rPr lang="en-US" sz="1600" dirty="0"/>
-                <a:t>Ease of use / flexibility </a:t>
+                <a:t>Brand trust / dealership experience</a:t>
               </a:r>
             </a:p>
             <a:p>
@@ -4749,7 +4749,7 @@
               </a:pPr>
               <a:r>
                 <a:rPr lang="en-US" sz="1600" dirty="0"/>
-                <a:t>Brand trust / transparency</a:t>
+                <a:t>Ease of use / research and purchase journey </a:t>
               </a:r>
             </a:p>
           </p:txBody>
